--- a/courses/learn_legalization/module02-07-tetris-row-pack/slides.pptx
+++ b/courses/learn_legalization/module02-07-tetris-row-pack/slides.pptx
@@ -16,6 +16,9 @@
     <p:sldId id="264" r:id="rId16"/>
     <p:sldId id="265" r:id="rId17"/>
     <p:sldId id="266" r:id="rId18"/>
+    <p:sldId id="267" r:id="rId19"/>
+    <p:sldId id="268" r:id="rId20"/>
+    <p:sldId id="269" r:id="rId21"/>
   </p:sldIdLst>
   <p:sldSz cx="12191695" cy="6858000" type="screen4x3"/>
   <p:notesSz cx="6858000" cy="9144000"/>
@@ -582,7 +585,7 @@
           <a:lstStyle/>
           <a:p>
             <a:r>
-              <a:t>Common traps: assuming snap alone legalizes; forgetting site width when checking overlap; ignoring fixed macro D at (8, 4); reporting HPWL without legality; and comparing Abacus and Tetris without naming displacement versus wirelength tradeoffs.</a:t>
+              <a:t>In the browser lab track, open the **tetris-row-pack** lab from the tools shelf. Open the interactive lab, place or snap cells on the site and row grid—or use an Apply helper—then Check. Reveal golden is study-only. Work the challenges that lock the goldens, then come back to implement the same loop yourself.</a:t>
             </a:r>
           </a:p>
         </p:txBody>
@@ -652,6 +655,146 @@
           <a:lstStyle/>
           <a:p>
             <a:r>
+              <a:t>In the implement track, open this module's EXAMPLES.md Pseudocode section and the course common solvers. Parse `tiny_legal.json`, run the algorithm with deterministic coordinates, and print legality, displacement, and HPWL. Match the browser goldens before you claim the checklist.</a:t>
+            </a:r>
+          </a:p>
+        </p:txBody>
+      </p:sp>
+      <p:sp>
+        <p:nvSpPr>
+          <p:cNvPr id="4" name="Slide Number Placeholder 3"/>
+          <p:cNvSpPr>
+            <a:spLocks noGrp="1"/>
+          </p:cNvSpPr>
+          <p:nvPr>
+            <p:ph type="sldNum" idx="5" sz="quarter"/>
+          </p:nvPr>
+        </p:nvSpPr>
+        <p:spPr/>
+      </p:sp>
+    </p:spTree>
+  </p:cSld>
+  <p:clrMapOvr>
+    <a:masterClrMapping/>
+  </p:clrMapOvr>
+</p:notes>
+</file>
+
+<file path=ppt/notesSlides/notesSlide12.xml><?xml version="1.0" encoding="utf-8"?>
+<p:notes xmlns:a="http://schemas.openxmlformats.org/drawingml/2006/main" xmlns:p="http://schemas.openxmlformats.org/presentationml/2006/main" xmlns:r="http://schemas.openxmlformats.org/officeDocument/2006/relationships">
+  <p:cSld>
+    <p:spTree>
+      <p:nvGrpSpPr>
+        <p:cNvPr id="1" name=""/>
+        <p:cNvGrpSpPr/>
+        <p:nvPr/>
+      </p:nvGrpSpPr>
+      <p:grpSpPr>
+        <a:xfrm>
+          <a:off x="0" y="0"/>
+          <a:ext cx="0" cy="0"/>
+          <a:chOff x="0" y="0"/>
+          <a:chExt cx="0" cy="0"/>
+        </a:xfrm>
+      </p:grpSpPr>
+      <p:sp>
+        <p:nvSpPr>
+          <p:cNvPr id="2" name="Slide Image Placeholder 1"/>
+          <p:cNvSpPr>
+            <a:spLocks noGrp="1"/>
+          </p:cNvSpPr>
+          <p:nvPr>
+            <p:ph type="sldImg" idx="2"/>
+          </p:nvPr>
+        </p:nvSpPr>
+        <p:spPr/>
+      </p:sp>
+      <p:sp>
+        <p:nvSpPr>
+          <p:cNvPr id="3" name="Notes Placeholder 2"/>
+          <p:cNvSpPr>
+            <a:spLocks noGrp="1"/>
+          </p:cNvSpPr>
+          <p:nvPr>
+            <p:ph type="body" idx="3" sz="quarter"/>
+          </p:nvPr>
+        </p:nvSpPr>
+        <p:spPr/>
+        <p:txBody>
+          <a:bodyPr/>
+          <a:lstStyle/>
+          <a:p>
+            <a:r>
+              <a:t>Common traps: assuming snap alone legalizes; forgetting site width when checking overlap; ignoring fixed macro D at (8, 4); reporting HPWL without legality; and comparing Abacus and Tetris without naming displacement versus wirelength tradeoffs.</a:t>
+            </a:r>
+          </a:p>
+        </p:txBody>
+      </p:sp>
+      <p:sp>
+        <p:nvSpPr>
+          <p:cNvPr id="4" name="Slide Number Placeholder 3"/>
+          <p:cNvSpPr>
+            <a:spLocks noGrp="1"/>
+          </p:cNvSpPr>
+          <p:nvPr>
+            <p:ph type="sldNum" idx="5" sz="quarter"/>
+          </p:nvPr>
+        </p:nvSpPr>
+        <p:spPr/>
+      </p:sp>
+    </p:spTree>
+  </p:cSld>
+  <p:clrMapOvr>
+    <a:masterClrMapping/>
+  </p:clrMapOvr>
+</p:notes>
+</file>
+
+<file path=ppt/notesSlides/notesSlide13.xml><?xml version="1.0" encoding="utf-8"?>
+<p:notes xmlns:a="http://schemas.openxmlformats.org/drawingml/2006/main" xmlns:p="http://schemas.openxmlformats.org/presentationml/2006/main" xmlns:r="http://schemas.openxmlformats.org/officeDocument/2006/relationships">
+  <p:cSld>
+    <p:spTree>
+      <p:nvGrpSpPr>
+        <p:cNvPr id="1" name=""/>
+        <p:cNvGrpSpPr/>
+        <p:nvPr/>
+      </p:nvGrpSpPr>
+      <p:grpSpPr>
+        <a:xfrm>
+          <a:off x="0" y="0"/>
+          <a:ext cx="0" cy="0"/>
+          <a:chOff x="0" y="0"/>
+          <a:chExt cx="0" cy="0"/>
+        </a:xfrm>
+      </p:grpSpPr>
+      <p:sp>
+        <p:nvSpPr>
+          <p:cNvPr id="2" name="Slide Image Placeholder 1"/>
+          <p:cNvSpPr>
+            <a:spLocks noGrp="1"/>
+          </p:cNvSpPr>
+          <p:nvPr>
+            <p:ph type="sldImg" idx="2"/>
+          </p:nvPr>
+        </p:nvSpPr>
+        <p:spPr/>
+      </p:sp>
+      <p:sp>
+        <p:nvSpPr>
+          <p:cNvPr id="3" name="Notes Placeholder 2"/>
+          <p:cNvSpPr>
+            <a:spLocks noGrp="1"/>
+          </p:cNvSpPr>
+          <p:nvPr>
+            <p:ph type="body" idx="3" sz="quarter"/>
+          </p:nvPr>
+        </p:nvSpPr>
+        <p:spPr/>
+        <p:txBody>
+          <a:bodyPr/>
+          <a:lstStyle/>
+          <a:p>
+            <a:r>
               <a:t>Complete the checklist for at least one track—preferably both. Implement until your metrics match the starter goldens. When you're ready, take the short quiz, then continue to the next module.</a:t>
             </a:r>
           </a:p>
@@ -725,12 +868,6 @@
               <a:t>Tetris is simpler than Abacus but moves cells farther on this toy. Contrast disp six versus Abacus disp four. Trade simpler control flow against a tighter displacement budget and slightly higher HPWL when Abacus wins movement.</a:t>
             </a:r>
           </a:p>
-          <a:p/>
-          <a:p>
-            <a:r>
-              <a:t>&lt;!-- algorithm-walkthrough --&gt;</a:t>
-            </a:r>
-          </a:p>
         </p:txBody>
       </p:sp>
       <p:sp>
@@ -798,7 +935,13 @@
           <a:lstStyle/>
           <a:p>
             <a:r>
-              <a:t>Tetris-lite assigns each cell to its nearest row, then left-packs within the row—same engine as overlap removal. Start from the triple stack at (4, 2).</a:t>
+              <a:t>Tetris pseudocode is shorter than Abacus on purpose. First assign each cell to its nearest row and freeze that choice. Then reuse the per-row left pack from overlap removal.</a:t>
+            </a:r>
+          </a:p>
+          <a:p/>
+          <a:p>
+            <a:r>
+              <a:t>Open this module's examples file and find the Pseudocode section. That written sketch is what you implement on the implement track and what the browser challenges measure.</a:t>
             </a:r>
           </a:p>
         </p:txBody>
@@ -868,7 +1011,7 @@
           <a:lstStyle/>
           <a:p>
             <a:r>
-              <a:t>A, B, and C stay on middle row two after snap. Sort by x and pack: A at four, B at six, C at eight—identical to overlap removal on this instance.</a:t>
+              <a:t>Same teaching seed, same numbers as overlap removal: displacement six, HPWL thirty-two. Write the compare line in the sketch so you remember Abacus spends search to cut displacement to four.</a:t>
             </a:r>
           </a:p>
         </p:txBody>
@@ -938,7 +1081,7 @@
           <a:lstStyle/>
           <a:p>
             <a:r>
-              <a:t>Tetris legalizes with displacement six and HPWL thirty-two—the overlap-removal golden. Same coordinates, same metrics: this is the global legalize path in later labs.</a:t>
+              <a:t>Tetris-lite assigns each cell to its nearest row, then left-packs within the row—same engine as overlap removal. Start from the triple stack at (4, 2).</a:t>
             </a:r>
           </a:p>
         </p:txBody>
@@ -1008,7 +1151,7 @@
           <a:lstStyle/>
           <a:p>
             <a:r>
-              <a:t>Abacus spreads A, B, C across three rows for displacement four. Tetris keeps them on one row and moves farther in x—six total L1 units.</a:t>
+              <a:t>A, B, and C stay on middle row two after snap. Sort by x and pack: A at four, B at six, C at eight—identical to overlap removal on this instance.</a:t>
             </a:r>
           </a:p>
         </p:txBody>
@@ -1078,13 +1221,7 @@
           <a:lstStyle/>
           <a:p>
             <a:r>
-              <a:t>Tetris is easier to implement and slightly better on HPWL for this toy. Abacus is the choice when displacement budget is tight—preview the detailed-vs-global lab.</a:t>
-            </a:r>
-          </a:p>
-          <a:p/>
-          <a:p>
-            <a:r>
-              <a:t>&lt;!-- /algorithm-walkthrough --&gt;</a:t>
+              <a:t>Tetris legalizes with displacement six and HPWL thirty-two—the overlap-removal golden. Same coordinates, same metrics: this is the global legalize path in later labs.</a:t>
             </a:r>
           </a:p>
         </p:txBody>
@@ -1154,7 +1291,7 @@
           <a:lstStyle/>
           <a:p>
             <a:r>
-              <a:t>In the browser lab track, open the **tetris-row-pack** lab from the tools shelf. Load the overlap or float starter, run the legalizer once, and read legality plus displacement and HPWL when the panel shows them. Work the challenges that lock the goldens, then come back to implement the same loop yourself.</a:t>
+              <a:t>Abacus spreads A, B, C across three rows for displacement four. Tetris keeps them on one row and moves farther in x—six total L1 units.</a:t>
             </a:r>
           </a:p>
         </p:txBody>
@@ -1224,7 +1361,7 @@
           <a:lstStyle/>
           <a:p>
             <a:r>
-              <a:t>In the implement track, open this module's examples and the course `common/` solvers. Parse `tiny_legal.json`, run the algorithm with deterministic coordinates, and print legality, displacement, and HPWL. Match the browser goldens before you claim the checklist.</a:t>
+              <a:t>Tetris is easier to implement and slightly better on HPWL for this toy. Abacus is the choice when displacement budget is tight—preview the detailed-vs-global lab.</a:t>
             </a:r>
           </a:p>
         </p:txBody>
@@ -4382,21 +4519,45 @@
                 </a:solidFill>
                 <a:latin typeface="Calibri"/>
               </a:rPr>
-              <a:t>Pitfalls</a:t>
-            </a:r>
-          </a:p>
-        </p:txBody>
-      </p:sp>
-      <p:sp>
-        <p:nvSpPr>
-          <p:cNvPr id="3" name="TextBox 2"/>
+              <a:t>Tradeoff: simpler vs better displacement</a:t>
+            </a:r>
+          </a:p>
+        </p:txBody>
+      </p:sp>
+      <p:pic>
+        <p:nvPicPr>
+          <p:cNvPr id="3" name="Picture 2" descr="05-tradeoff.png"/>
+          <p:cNvPicPr>
+            <a:picLocks noChangeAspect="1"/>
+          </p:cNvPicPr>
+          <p:nvPr/>
+        </p:nvPicPr>
+        <p:blipFill>
+          <a:blip r:embed="rId2"/>
+          <a:stretch>
+            <a:fillRect/>
+          </a:stretch>
+        </p:blipFill>
+        <p:spPr>
+          <a:xfrm>
+            <a:off x="548640" y="1143000"/>
+            <a:ext cx="9404113" cy="4572000"/>
+          </a:xfrm>
+          <a:prstGeom prst="rect">
+            <a:avLst/>
+          </a:prstGeom>
+        </p:spPr>
+      </p:pic>
+      <p:sp>
+        <p:nvSpPr>
+          <p:cNvPr id="4" name="TextBox 3"/>
           <p:cNvSpPr txBox="1"/>
           <p:nvPr/>
         </p:nvSpPr>
         <p:spPr>
           <a:xfrm>
-            <a:off x="548640" y="1234440"/>
-            <a:ext cx="11064240" cy="4937760"/>
+            <a:off x="548640" y="5897880"/>
+            <a:ext cx="11064240" cy="411480"/>
           </a:xfrm>
           <a:prstGeom prst="rect">
             <a:avLst/>
@@ -4409,32 +4570,26 @@
           </a:bodyPr>
           <a:lstStyle/>
           <a:p>
-            <a:pPr lvl="0" marL="457200" indent="-228600">
-              <a:buFont typeface="Calibri"/>
-              <a:spcAft>
-                <a:spcPts val="1000"/>
-              </a:spcAft>
-              <a:buSzPct val="100000"/>
-              <a:buChar char="•"/>
+            <a:pPr>
               <a:lnSpc>
                 <a:spcPts val="2200"/>
               </a:lnSpc>
             </a:pPr>
             <a:r>
-              <a:rPr sz="2000" b="0">
+              <a:rPr sz="1200" b="0">
                 <a:solidFill>
                   <a:srgbClr val="333333"/>
                 </a:solidFill>
                 <a:latin typeface="Calibri"/>
               </a:rPr>
-              <a:t>Common traps</a:t>
-            </a:r>
-          </a:p>
-        </p:txBody>
-      </p:sp>
-      <p:sp>
-        <p:nvSpPr>
-          <p:cNvPr id="4" name="TextBox 3"/>
+              <a:t>Tradeoff: simpler vs better displacement</a:t>
+            </a:r>
+          </a:p>
+        </p:txBody>
+      </p:sp>
+      <p:sp>
+        <p:nvSpPr>
+          <p:cNvPr id="5" name="TextBox 4"/>
           <p:cNvSpPr txBox="1"/>
           <p:nvPr/>
         </p:nvSpPr>
@@ -4523,6 +4678,557 @@
                 </a:solidFill>
                 <a:latin typeface="Calibri"/>
               </a:rPr>
+              <a:t>Browser lab track</a:t>
+            </a:r>
+          </a:p>
+        </p:txBody>
+      </p:sp>
+      <p:sp>
+        <p:nvSpPr>
+          <p:cNvPr id="3" name="TextBox 2"/>
+          <p:cNvSpPr txBox="1"/>
+          <p:nvPr/>
+        </p:nvSpPr>
+        <p:spPr>
+          <a:xfrm>
+            <a:off x="548640" y="1234440"/>
+            <a:ext cx="11064240" cy="4937760"/>
+          </a:xfrm>
+          <a:prstGeom prst="rect">
+            <a:avLst/>
+          </a:prstGeom>
+          <a:noFill/>
+        </p:spPr>
+        <p:txBody>
+          <a:bodyPr wrap="square">
+            <a:noAutofit/>
+          </a:bodyPr>
+          <a:lstStyle/>
+          <a:p>
+            <a:pPr lvl="0" marL="457200" indent="-228600">
+              <a:buFont typeface="Calibri"/>
+              <a:spcAft>
+                <a:spcPts val="1000"/>
+              </a:spcAft>
+              <a:buSzPct val="100000"/>
+              <a:buChar char="•"/>
+              <a:lnSpc>
+                <a:spcPts val="2200"/>
+              </a:lnSpc>
+            </a:pPr>
+            <a:r>
+              <a:rPr sz="2000" b="0">
+                <a:solidFill>
+                  <a:srgbClr val="333333"/>
+                </a:solidFill>
+                <a:latin typeface="Calibri"/>
+              </a:rPr>
+              <a:t>In the browser lab track, open the </a:t>
+            </a:r>
+            <a:r>
+              <a:rPr sz="2000" b="1">
+                <a:solidFill>
+                  <a:srgbClr val="333333"/>
+                </a:solidFill>
+                <a:latin typeface="Calibri"/>
+              </a:rPr>
+              <a:t>tetris-row-pack</a:t>
+            </a:r>
+            <a:r>
+              <a:rPr sz="2000" b="0">
+                <a:solidFill>
+                  <a:srgbClr val="333333"/>
+                </a:solidFill>
+                <a:latin typeface="Calibri"/>
+              </a:rPr>
+              <a:t> lab from the tools shelf</a:t>
+            </a:r>
+          </a:p>
+          <a:p>
+            <a:pPr lvl="0" marL="457200" indent="-228600">
+              <a:buFont typeface="Calibri"/>
+              <a:spcAft>
+                <a:spcPts val="1000"/>
+              </a:spcAft>
+              <a:buSzPct val="100000"/>
+              <a:buChar char="•"/>
+              <a:lnSpc>
+                <a:spcPts val="2200"/>
+              </a:lnSpc>
+            </a:pPr>
+            <a:r>
+              <a:rPr sz="2000" b="0">
+                <a:solidFill>
+                  <a:srgbClr val="333333"/>
+                </a:solidFill>
+                <a:latin typeface="Calibri"/>
+              </a:rPr>
+              <a:t>Open the interactive lab</a:t>
+            </a:r>
+          </a:p>
+          <a:p>
+            <a:pPr lvl="0" marL="457200" indent="-228600">
+              <a:buFont typeface="Calibri"/>
+              <a:spcAft>
+                <a:spcPts val="1000"/>
+              </a:spcAft>
+              <a:buSzPct val="100000"/>
+              <a:buChar char="•"/>
+              <a:lnSpc>
+                <a:spcPts val="2200"/>
+              </a:lnSpc>
+            </a:pPr>
+            <a:r>
+              <a:rPr sz="2000" b="0">
+                <a:solidFill>
+                  <a:srgbClr val="333333"/>
+                </a:solidFill>
+                <a:latin typeface="Calibri"/>
+              </a:rPr>
+              <a:t>Reveal golden is study-only</a:t>
+            </a:r>
+          </a:p>
+          <a:p>
+            <a:pPr lvl="0" marL="457200" indent="-228600">
+              <a:buFont typeface="Calibri"/>
+              <a:spcAft>
+                <a:spcPts val="1000"/>
+              </a:spcAft>
+              <a:buSzPct val="100000"/>
+              <a:buChar char="•"/>
+              <a:lnSpc>
+                <a:spcPts val="2200"/>
+              </a:lnSpc>
+            </a:pPr>
+            <a:r>
+              <a:rPr sz="2000" b="0">
+                <a:solidFill>
+                  <a:srgbClr val="333333"/>
+                </a:solidFill>
+                <a:latin typeface="Calibri"/>
+              </a:rPr>
+              <a:t>Work the challenges that lock the goldens</a:t>
+            </a:r>
+          </a:p>
+        </p:txBody>
+      </p:sp>
+      <p:sp>
+        <p:nvSpPr>
+          <p:cNvPr id="4" name="TextBox 3"/>
+          <p:cNvSpPr txBox="1"/>
+          <p:nvPr/>
+        </p:nvSpPr>
+        <p:spPr>
+          <a:xfrm>
+            <a:off x="548640" y="6355080"/>
+            <a:ext cx="11064240" cy="320040"/>
+          </a:xfrm>
+          <a:prstGeom prst="rect">
+            <a:avLst/>
+          </a:prstGeom>
+          <a:noFill/>
+        </p:spPr>
+        <p:txBody>
+          <a:bodyPr wrap="square">
+            <a:noAutofit/>
+          </a:bodyPr>
+          <a:lstStyle/>
+          <a:p>
+            <a:pPr algn="r">
+              <a:lnSpc>
+                <a:spcPts val="2200"/>
+              </a:lnSpc>
+              <a:defRPr sz="1000" b="0">
+                <a:solidFill>
+                  <a:srgbClr val="666666"/>
+                </a:solidFill>
+                <a:latin typeface="Calibri"/>
+              </a:defRPr>
+            </a:pPr>
+            <a:r>
+              <a:t>learn_legalization — 07 tetris row pack</a:t>
+            </a:r>
+          </a:p>
+        </p:txBody>
+      </p:sp>
+    </p:spTree>
+  </p:cSld>
+  <p:clrMapOvr>
+    <a:masterClrMapping/>
+  </p:clrMapOvr>
+</p:sld>
+</file>
+
+<file path=ppt/slides/slide12.xml><?xml version="1.0" encoding="utf-8"?>
+<p:sld xmlns:a="http://schemas.openxmlformats.org/drawingml/2006/main" xmlns:p="http://schemas.openxmlformats.org/presentationml/2006/main" xmlns:r="http://schemas.openxmlformats.org/officeDocument/2006/relationships">
+  <p:cSld>
+    <p:spTree>
+      <p:nvGrpSpPr>
+        <p:cNvPr id="1" name=""/>
+        <p:cNvGrpSpPr/>
+        <p:nvPr/>
+      </p:nvGrpSpPr>
+      <p:grpSpPr/>
+      <p:sp>
+        <p:nvSpPr>
+          <p:cNvPr id="2" name="TextBox 1"/>
+          <p:cNvSpPr txBox="1"/>
+          <p:nvPr/>
+        </p:nvSpPr>
+        <p:spPr>
+          <a:xfrm>
+            <a:off x="548640" y="411480"/>
+            <a:ext cx="11064240" cy="777240"/>
+          </a:xfrm>
+          <a:prstGeom prst="rect">
+            <a:avLst/>
+          </a:prstGeom>
+          <a:noFill/>
+        </p:spPr>
+        <p:txBody>
+          <a:bodyPr wrap="square">
+            <a:noAutofit/>
+          </a:bodyPr>
+          <a:lstStyle/>
+          <a:p>
+            <a:pPr>
+              <a:lnSpc>
+                <a:spcPts val="2200"/>
+              </a:lnSpc>
+            </a:pPr>
+            <a:r>
+              <a:rPr sz="2800" b="1">
+                <a:solidFill>
+                  <a:srgbClr val="1A1A2E"/>
+                </a:solidFill>
+                <a:latin typeface="Calibri"/>
+              </a:rPr>
+              <a:t>Implement track</a:t>
+            </a:r>
+          </a:p>
+        </p:txBody>
+      </p:sp>
+      <p:sp>
+        <p:nvSpPr>
+          <p:cNvPr id="3" name="TextBox 2"/>
+          <p:cNvSpPr txBox="1"/>
+          <p:nvPr/>
+        </p:nvSpPr>
+        <p:spPr>
+          <a:xfrm>
+            <a:off x="548640" y="1234440"/>
+            <a:ext cx="11064240" cy="4937760"/>
+          </a:xfrm>
+          <a:prstGeom prst="rect">
+            <a:avLst/>
+          </a:prstGeom>
+          <a:noFill/>
+        </p:spPr>
+        <p:txBody>
+          <a:bodyPr wrap="square">
+            <a:noAutofit/>
+          </a:bodyPr>
+          <a:lstStyle/>
+          <a:p>
+            <a:pPr lvl="0" marL="457200" indent="-228600">
+              <a:buFont typeface="Calibri"/>
+              <a:spcAft>
+                <a:spcPts val="1000"/>
+              </a:spcAft>
+              <a:buSzPct val="100000"/>
+              <a:buChar char="•"/>
+              <a:lnSpc>
+                <a:spcPts val="2200"/>
+              </a:lnSpc>
+            </a:pPr>
+            <a:r>
+              <a:rPr sz="2000" b="0">
+                <a:solidFill>
+                  <a:srgbClr val="333333"/>
+                </a:solidFill>
+                <a:latin typeface="Calibri"/>
+              </a:rPr>
+              <a:t>In the implement track</a:t>
+            </a:r>
+          </a:p>
+          <a:p>
+            <a:pPr lvl="0" marL="457200" indent="-228600">
+              <a:buFont typeface="Calibri"/>
+              <a:spcAft>
+                <a:spcPts val="1000"/>
+              </a:spcAft>
+              <a:buSzPct val="100000"/>
+              <a:buChar char="•"/>
+              <a:lnSpc>
+                <a:spcPts val="2200"/>
+              </a:lnSpc>
+            </a:pPr>
+            <a:r>
+              <a:rPr sz="2000" b="0">
+                <a:solidFill>
+                  <a:srgbClr val="333333"/>
+                </a:solidFill>
+                <a:latin typeface="Calibri"/>
+              </a:rPr>
+              <a:t>Parse `tiny_legal.json`, run the algorithm with deterministic coordinates</a:t>
+            </a:r>
+          </a:p>
+          <a:p>
+            <a:pPr lvl="0" marL="457200" indent="-228600">
+              <a:buFont typeface="Calibri"/>
+              <a:spcAft>
+                <a:spcPts val="1000"/>
+              </a:spcAft>
+              <a:buSzPct val="100000"/>
+              <a:buChar char="•"/>
+              <a:lnSpc>
+                <a:spcPts val="2200"/>
+              </a:lnSpc>
+            </a:pPr>
+            <a:r>
+              <a:rPr sz="2000" b="0">
+                <a:solidFill>
+                  <a:srgbClr val="333333"/>
+                </a:solidFill>
+                <a:latin typeface="Calibri"/>
+              </a:rPr>
+              <a:t>Match the browser goldens before you claim the checklist</a:t>
+            </a:r>
+          </a:p>
+        </p:txBody>
+      </p:sp>
+      <p:sp>
+        <p:nvSpPr>
+          <p:cNvPr id="4" name="TextBox 3"/>
+          <p:cNvSpPr txBox="1"/>
+          <p:nvPr/>
+        </p:nvSpPr>
+        <p:spPr>
+          <a:xfrm>
+            <a:off x="548640" y="6355080"/>
+            <a:ext cx="11064240" cy="320040"/>
+          </a:xfrm>
+          <a:prstGeom prst="rect">
+            <a:avLst/>
+          </a:prstGeom>
+          <a:noFill/>
+        </p:spPr>
+        <p:txBody>
+          <a:bodyPr wrap="square">
+            <a:noAutofit/>
+          </a:bodyPr>
+          <a:lstStyle/>
+          <a:p>
+            <a:pPr algn="r">
+              <a:lnSpc>
+                <a:spcPts val="2200"/>
+              </a:lnSpc>
+              <a:defRPr sz="1000" b="0">
+                <a:solidFill>
+                  <a:srgbClr val="666666"/>
+                </a:solidFill>
+                <a:latin typeface="Calibri"/>
+              </a:defRPr>
+            </a:pPr>
+            <a:r>
+              <a:t>learn_legalization — 07 tetris row pack</a:t>
+            </a:r>
+          </a:p>
+        </p:txBody>
+      </p:sp>
+    </p:spTree>
+  </p:cSld>
+  <p:clrMapOvr>
+    <a:masterClrMapping/>
+  </p:clrMapOvr>
+</p:sld>
+</file>
+
+<file path=ppt/slides/slide13.xml><?xml version="1.0" encoding="utf-8"?>
+<p:sld xmlns:a="http://schemas.openxmlformats.org/drawingml/2006/main" xmlns:p="http://schemas.openxmlformats.org/presentationml/2006/main" xmlns:r="http://schemas.openxmlformats.org/officeDocument/2006/relationships">
+  <p:cSld>
+    <p:spTree>
+      <p:nvGrpSpPr>
+        <p:cNvPr id="1" name=""/>
+        <p:cNvGrpSpPr/>
+        <p:nvPr/>
+      </p:nvGrpSpPr>
+      <p:grpSpPr/>
+      <p:sp>
+        <p:nvSpPr>
+          <p:cNvPr id="2" name="TextBox 1"/>
+          <p:cNvSpPr txBox="1"/>
+          <p:nvPr/>
+        </p:nvSpPr>
+        <p:spPr>
+          <a:xfrm>
+            <a:off x="548640" y="411480"/>
+            <a:ext cx="11064240" cy="777240"/>
+          </a:xfrm>
+          <a:prstGeom prst="rect">
+            <a:avLst/>
+          </a:prstGeom>
+          <a:noFill/>
+        </p:spPr>
+        <p:txBody>
+          <a:bodyPr wrap="square">
+            <a:noAutofit/>
+          </a:bodyPr>
+          <a:lstStyle/>
+          <a:p>
+            <a:pPr>
+              <a:lnSpc>
+                <a:spcPts val="2200"/>
+              </a:lnSpc>
+            </a:pPr>
+            <a:r>
+              <a:rPr sz="2800" b="1">
+                <a:solidFill>
+                  <a:srgbClr val="1A1A2E"/>
+                </a:solidFill>
+                <a:latin typeface="Calibri"/>
+              </a:rPr>
+              <a:t>Pitfalls</a:t>
+            </a:r>
+          </a:p>
+        </p:txBody>
+      </p:sp>
+      <p:sp>
+        <p:nvSpPr>
+          <p:cNvPr id="3" name="TextBox 2"/>
+          <p:cNvSpPr txBox="1"/>
+          <p:nvPr/>
+        </p:nvSpPr>
+        <p:spPr>
+          <a:xfrm>
+            <a:off x="548640" y="1234440"/>
+            <a:ext cx="11064240" cy="4937760"/>
+          </a:xfrm>
+          <a:prstGeom prst="rect">
+            <a:avLst/>
+          </a:prstGeom>
+          <a:noFill/>
+        </p:spPr>
+        <p:txBody>
+          <a:bodyPr wrap="square">
+            <a:noAutofit/>
+          </a:bodyPr>
+          <a:lstStyle/>
+          <a:p>
+            <a:pPr lvl="0" marL="457200" indent="-228600">
+              <a:buFont typeface="Calibri"/>
+              <a:spcAft>
+                <a:spcPts val="1000"/>
+              </a:spcAft>
+              <a:buSzPct val="100000"/>
+              <a:buChar char="•"/>
+              <a:lnSpc>
+                <a:spcPts val="2200"/>
+              </a:lnSpc>
+            </a:pPr>
+            <a:r>
+              <a:rPr sz="2000" b="0">
+                <a:solidFill>
+                  <a:srgbClr val="333333"/>
+                </a:solidFill>
+                <a:latin typeface="Calibri"/>
+              </a:rPr>
+              <a:t>Common traps</a:t>
+            </a:r>
+          </a:p>
+        </p:txBody>
+      </p:sp>
+      <p:sp>
+        <p:nvSpPr>
+          <p:cNvPr id="4" name="TextBox 3"/>
+          <p:cNvSpPr txBox="1"/>
+          <p:nvPr/>
+        </p:nvSpPr>
+        <p:spPr>
+          <a:xfrm>
+            <a:off x="548640" y="6355080"/>
+            <a:ext cx="11064240" cy="320040"/>
+          </a:xfrm>
+          <a:prstGeom prst="rect">
+            <a:avLst/>
+          </a:prstGeom>
+          <a:noFill/>
+        </p:spPr>
+        <p:txBody>
+          <a:bodyPr wrap="square">
+            <a:noAutofit/>
+          </a:bodyPr>
+          <a:lstStyle/>
+          <a:p>
+            <a:pPr algn="r">
+              <a:lnSpc>
+                <a:spcPts val="2200"/>
+              </a:lnSpc>
+              <a:defRPr sz="1000" b="0">
+                <a:solidFill>
+                  <a:srgbClr val="666666"/>
+                </a:solidFill>
+                <a:latin typeface="Calibri"/>
+              </a:defRPr>
+            </a:pPr>
+            <a:r>
+              <a:t>learn_legalization — 07 tetris row pack</a:t>
+            </a:r>
+          </a:p>
+        </p:txBody>
+      </p:sp>
+    </p:spTree>
+  </p:cSld>
+  <p:clrMapOvr>
+    <a:masterClrMapping/>
+  </p:clrMapOvr>
+</p:sld>
+</file>
+
+<file path=ppt/slides/slide14.xml><?xml version="1.0" encoding="utf-8"?>
+<p:sld xmlns:a="http://schemas.openxmlformats.org/drawingml/2006/main" xmlns:p="http://schemas.openxmlformats.org/presentationml/2006/main" xmlns:r="http://schemas.openxmlformats.org/officeDocument/2006/relationships">
+  <p:cSld>
+    <p:spTree>
+      <p:nvGrpSpPr>
+        <p:cNvPr id="1" name=""/>
+        <p:cNvGrpSpPr/>
+        <p:nvPr/>
+      </p:nvGrpSpPr>
+      <p:grpSpPr/>
+      <p:sp>
+        <p:nvSpPr>
+          <p:cNvPr id="2" name="TextBox 1"/>
+          <p:cNvSpPr txBox="1"/>
+          <p:nvPr/>
+        </p:nvSpPr>
+        <p:spPr>
+          <a:xfrm>
+            <a:off x="548640" y="411480"/>
+            <a:ext cx="11064240" cy="777240"/>
+          </a:xfrm>
+          <a:prstGeom prst="rect">
+            <a:avLst/>
+          </a:prstGeom>
+          <a:noFill/>
+        </p:spPr>
+        <p:txBody>
+          <a:bodyPr wrap="square">
+            <a:noAutofit/>
+          </a:bodyPr>
+          <a:lstStyle/>
+          <a:p>
+            <a:pPr>
+              <a:lnSpc>
+                <a:spcPts val="2200"/>
+              </a:lnSpc>
+            </a:pPr>
+            <a:r>
+              <a:rPr sz="2800" b="1">
+                <a:solidFill>
+                  <a:srgbClr val="1A1A2E"/>
+                </a:solidFill>
+                <a:latin typeface="Calibri"/>
+              </a:rPr>
               <a:t>Your turn</a:t>
             </a:r>
           </a:p>
@@ -4800,6 +5506,125 @@
               <a:t>Trade simpler control flow against a tighter displacement budget and slightly higher HPWL</a:t>
             </a:r>
           </a:p>
+        </p:txBody>
+      </p:sp>
+      <p:sp>
+        <p:nvSpPr>
+          <p:cNvPr id="4" name="TextBox 3"/>
+          <p:cNvSpPr txBox="1"/>
+          <p:nvPr/>
+        </p:nvSpPr>
+        <p:spPr>
+          <a:xfrm>
+            <a:off x="548640" y="6355080"/>
+            <a:ext cx="11064240" cy="320040"/>
+          </a:xfrm>
+          <a:prstGeom prst="rect">
+            <a:avLst/>
+          </a:prstGeom>
+          <a:noFill/>
+        </p:spPr>
+        <p:txBody>
+          <a:bodyPr wrap="square">
+            <a:noAutofit/>
+          </a:bodyPr>
+          <a:lstStyle/>
+          <a:p>
+            <a:pPr algn="r">
+              <a:lnSpc>
+                <a:spcPts val="2200"/>
+              </a:lnSpc>
+              <a:defRPr sz="1000" b="0">
+                <a:solidFill>
+                  <a:srgbClr val="666666"/>
+                </a:solidFill>
+                <a:latin typeface="Calibri"/>
+              </a:defRPr>
+            </a:pPr>
+            <a:r>
+              <a:t>learn_legalization — 07 tetris row pack</a:t>
+            </a:r>
+          </a:p>
+        </p:txBody>
+      </p:sp>
+    </p:spTree>
+  </p:cSld>
+  <p:clrMapOvr>
+    <a:masterClrMapping/>
+  </p:clrMapOvr>
+</p:sld>
+</file>
+
+<file path=ppt/slides/slide3.xml><?xml version="1.0" encoding="utf-8"?>
+<p:sld xmlns:a="http://schemas.openxmlformats.org/drawingml/2006/main" xmlns:p="http://schemas.openxmlformats.org/presentationml/2006/main" xmlns:r="http://schemas.openxmlformats.org/officeDocument/2006/relationships">
+  <p:cSld>
+    <p:spTree>
+      <p:nvGrpSpPr>
+        <p:cNvPr id="1" name=""/>
+        <p:cNvGrpSpPr/>
+        <p:nvPr/>
+      </p:nvGrpSpPr>
+      <p:grpSpPr/>
+      <p:sp>
+        <p:nvSpPr>
+          <p:cNvPr id="2" name="TextBox 1"/>
+          <p:cNvSpPr txBox="1"/>
+          <p:nvPr/>
+        </p:nvSpPr>
+        <p:spPr>
+          <a:xfrm>
+            <a:off x="548640" y="411480"/>
+            <a:ext cx="11064240" cy="777240"/>
+          </a:xfrm>
+          <a:prstGeom prst="rect">
+            <a:avLst/>
+          </a:prstGeom>
+          <a:noFill/>
+        </p:spPr>
+        <p:txBody>
+          <a:bodyPr wrap="square">
+            <a:noAutofit/>
+          </a:bodyPr>
+          <a:lstStyle/>
+          <a:p>
+            <a:pPr>
+              <a:lnSpc>
+                <a:spcPts val="2200"/>
+              </a:lnSpc>
+            </a:pPr>
+            <a:r>
+              <a:rPr sz="2800" b="1">
+                <a:solidFill>
+                  <a:srgbClr val="1A1A2E"/>
+                </a:solidFill>
+                <a:latin typeface="Calibri"/>
+              </a:rPr>
+              <a:t>Pseudocode</a:t>
+            </a:r>
+          </a:p>
+        </p:txBody>
+      </p:sp>
+      <p:sp>
+        <p:nvSpPr>
+          <p:cNvPr id="3" name="TextBox 2"/>
+          <p:cNvSpPr txBox="1"/>
+          <p:nvPr/>
+        </p:nvSpPr>
+        <p:spPr>
+          <a:xfrm>
+            <a:off x="548640" y="1234440"/>
+            <a:ext cx="11064240" cy="4937760"/>
+          </a:xfrm>
+          <a:prstGeom prst="rect">
+            <a:avLst/>
+          </a:prstGeom>
+          <a:noFill/>
+        </p:spPr>
+        <p:txBody>
+          <a:bodyPr wrap="square">
+            <a:noAutofit/>
+          </a:bodyPr>
+          <a:lstStyle/>
           <a:p>
             <a:pPr lvl="0" marL="457200" indent="-228600">
               <a:buFont typeface="Calibri"/>
@@ -4819,7 +5644,95 @@
                 </a:solidFill>
                 <a:latin typeface="Calibri"/>
               </a:rPr>
-              <a:t>&lt;!-- algorithm-walkthrough --&gt;</a:t>
+              <a:t>Tetris pseudocode is shorter than Abacus on purpose</a:t>
+            </a:r>
+          </a:p>
+          <a:p>
+            <a:pPr lvl="0" marL="457200" indent="-228600">
+              <a:buFont typeface="Calibri"/>
+              <a:spcAft>
+                <a:spcPts val="1000"/>
+              </a:spcAft>
+              <a:buSzPct val="100000"/>
+              <a:buChar char="•"/>
+              <a:lnSpc>
+                <a:spcPts val="2200"/>
+              </a:lnSpc>
+            </a:pPr>
+            <a:r>
+              <a:rPr sz="2000" b="0">
+                <a:solidFill>
+                  <a:srgbClr val="333333"/>
+                </a:solidFill>
+                <a:latin typeface="Calibri"/>
+              </a:rPr>
+              <a:t>First assign each cell to its nearest row and freeze that choice</a:t>
+            </a:r>
+          </a:p>
+          <a:p>
+            <a:pPr lvl="0" marL="457200" indent="-228600">
+              <a:buFont typeface="Calibri"/>
+              <a:spcAft>
+                <a:spcPts val="1000"/>
+              </a:spcAft>
+              <a:buSzPct val="100000"/>
+              <a:buChar char="•"/>
+              <a:lnSpc>
+                <a:spcPts val="2200"/>
+              </a:lnSpc>
+            </a:pPr>
+            <a:r>
+              <a:rPr sz="2000" b="0">
+                <a:solidFill>
+                  <a:srgbClr val="333333"/>
+                </a:solidFill>
+                <a:latin typeface="Calibri"/>
+              </a:rPr>
+              <a:t>Then reuse the per-row left pack from overlap removal</a:t>
+            </a:r>
+          </a:p>
+          <a:p>
+            <a:pPr lvl="0" marL="457200" indent="-228600">
+              <a:buFont typeface="Calibri"/>
+              <a:spcAft>
+                <a:spcPts val="1000"/>
+              </a:spcAft>
+              <a:buSzPct val="100000"/>
+              <a:buChar char="•"/>
+              <a:lnSpc>
+                <a:spcPts val="2200"/>
+              </a:lnSpc>
+            </a:pPr>
+            <a:r>
+              <a:rPr sz="2000" b="0">
+                <a:solidFill>
+                  <a:srgbClr val="333333"/>
+                </a:solidFill>
+                <a:latin typeface="Calibri"/>
+              </a:rPr>
+              <a:t>Open this module's examples file and find the Pseudocode section</a:t>
+            </a:r>
+          </a:p>
+          <a:p>
+            <a:pPr lvl="0" marL="457200" indent="-228600">
+              <a:buFont typeface="Calibri"/>
+              <a:spcAft>
+                <a:spcPts val="1000"/>
+              </a:spcAft>
+              <a:buSzPct val="100000"/>
+              <a:buChar char="•"/>
+              <a:lnSpc>
+                <a:spcPts val="2200"/>
+              </a:lnSpc>
+            </a:pPr>
+            <a:r>
+              <a:rPr sz="2000" b="0">
+                <a:solidFill>
+                  <a:srgbClr val="333333"/>
+                </a:solidFill>
+                <a:latin typeface="Calibri"/>
+              </a:rPr>
+              <a:t>That written sketch is what you implement on the implement track and what the browser</a:t>
             </a:r>
           </a:p>
         </p:txBody>
@@ -4871,7 +5784,405 @@
 </p:sld>
 </file>
 
-<file path=ppt/slides/slide3.xml><?xml version="1.0" encoding="utf-8"?>
+<file path=ppt/slides/slide4.xml><?xml version="1.0" encoding="utf-8"?>
+<p:sld xmlns:a="http://schemas.openxmlformats.org/drawingml/2006/main" xmlns:p="http://schemas.openxmlformats.org/presentationml/2006/main" xmlns:r="http://schemas.openxmlformats.org/officeDocument/2006/relationships">
+  <p:cSld>
+    <p:spTree>
+      <p:nvGrpSpPr>
+        <p:cNvPr id="1" name=""/>
+        <p:cNvGrpSpPr/>
+        <p:nvPr/>
+      </p:nvGrpSpPr>
+      <p:grpSpPr/>
+      <p:sp>
+        <p:nvSpPr>
+          <p:cNvPr id="2" name="TextBox 1"/>
+          <p:cNvSpPr txBox="1"/>
+          <p:nvPr/>
+        </p:nvSpPr>
+        <p:spPr>
+          <a:xfrm>
+            <a:off x="548640" y="411480"/>
+            <a:ext cx="11064240" cy="777240"/>
+          </a:xfrm>
+          <a:prstGeom prst="rect">
+            <a:avLst/>
+          </a:prstGeom>
+          <a:noFill/>
+        </p:spPr>
+        <p:txBody>
+          <a:bodyPr wrap="square">
+            <a:noAutofit/>
+          </a:bodyPr>
+          <a:lstStyle/>
+          <a:p>
+            <a:pPr>
+              <a:lnSpc>
+                <a:spcPts val="2200"/>
+              </a:lnSpc>
+            </a:pPr>
+            <a:r>
+              <a:rPr sz="2800" b="1">
+                <a:solidFill>
+                  <a:srgbClr val="1A1A2E"/>
+                </a:solidFill>
+                <a:latin typeface="Calibri"/>
+              </a:rPr>
+              <a:t>Algorithm sketch</a:t>
+            </a:r>
+          </a:p>
+        </p:txBody>
+      </p:sp>
+      <p:sp>
+        <p:nvSpPr>
+          <p:cNvPr id="3" name="TextBox 2"/>
+          <p:cNvSpPr txBox="1"/>
+          <p:nvPr/>
+        </p:nvSpPr>
+        <p:spPr>
+          <a:xfrm>
+            <a:off x="548640" y="1234440"/>
+            <a:ext cx="11064240" cy="4937760"/>
+          </a:xfrm>
+          <a:prstGeom prst="rect">
+            <a:avLst/>
+          </a:prstGeom>
+          <a:noFill/>
+        </p:spPr>
+        <p:txBody>
+          <a:bodyPr wrap="square">
+            <a:noAutofit/>
+          </a:bodyPr>
+          <a:lstStyle/>
+          <a:p>
+            <a:pPr lvl="0" marL="457200" indent="-228600">
+              <a:buFont typeface="Calibri"/>
+              <a:spcAft>
+                <a:spcPts val="1000"/>
+              </a:spcAft>
+              <a:buSzPct val="100000"/>
+              <a:buChar char="•"/>
+              <a:lnSpc>
+                <a:spcPts val="2200"/>
+              </a:lnSpc>
+            </a:pPr>
+            <a:r>
+              <a:rPr sz="2000" b="0">
+                <a:solidFill>
+                  <a:srgbClr val="333333"/>
+                </a:solidFill>
+                <a:latin typeface="Calibri"/>
+              </a:rPr>
+              <a:t>Same teaching seed, same numbers as overlap removal: displacement six, HPWL thirty-two</a:t>
+            </a:r>
+          </a:p>
+          <a:p>
+            <a:pPr lvl="0" marL="457200" indent="-228600">
+              <a:buFont typeface="Calibri"/>
+              <a:spcAft>
+                <a:spcPts val="1000"/>
+              </a:spcAft>
+              <a:buSzPct val="100000"/>
+              <a:buChar char="•"/>
+              <a:lnSpc>
+                <a:spcPts val="2200"/>
+              </a:lnSpc>
+            </a:pPr>
+            <a:r>
+              <a:rPr sz="2000" b="0">
+                <a:solidFill>
+                  <a:srgbClr val="333333"/>
+                </a:solidFill>
+                <a:latin typeface="Calibri"/>
+              </a:rPr>
+              <a:t>Write the compare line in the sketch so you remember Abacus spends search to cut</a:t>
+            </a:r>
+          </a:p>
+        </p:txBody>
+      </p:sp>
+      <p:sp>
+        <p:nvSpPr>
+          <p:cNvPr id="4" name="TextBox 3"/>
+          <p:cNvSpPr txBox="1"/>
+          <p:nvPr/>
+        </p:nvSpPr>
+        <p:spPr>
+          <a:xfrm>
+            <a:off x="548640" y="6355080"/>
+            <a:ext cx="11064240" cy="320040"/>
+          </a:xfrm>
+          <a:prstGeom prst="rect">
+            <a:avLst/>
+          </a:prstGeom>
+          <a:noFill/>
+        </p:spPr>
+        <p:txBody>
+          <a:bodyPr wrap="square">
+            <a:noAutofit/>
+          </a:bodyPr>
+          <a:lstStyle/>
+          <a:p>
+            <a:pPr algn="r">
+              <a:lnSpc>
+                <a:spcPts val="2200"/>
+              </a:lnSpc>
+              <a:defRPr sz="1000" b="0">
+                <a:solidFill>
+                  <a:srgbClr val="666666"/>
+                </a:solidFill>
+                <a:latin typeface="Calibri"/>
+              </a:defRPr>
+            </a:pPr>
+            <a:r>
+              <a:t>learn_legalization — 07 tetris row pack</a:t>
+            </a:r>
+          </a:p>
+        </p:txBody>
+      </p:sp>
+    </p:spTree>
+  </p:cSld>
+  <p:clrMapOvr>
+    <a:masterClrMapping/>
+  </p:clrMapOvr>
+</p:sld>
+</file>
+
+<file path=ppt/slides/slide5.xml><?xml version="1.0" encoding="utf-8"?>
+<p:sld xmlns:a="http://schemas.openxmlformats.org/drawingml/2006/main" xmlns:p="http://schemas.openxmlformats.org/presentationml/2006/main" xmlns:r="http://schemas.openxmlformats.org/officeDocument/2006/relationships">
+  <p:cSld>
+    <p:spTree>
+      <p:nvGrpSpPr>
+        <p:cNvPr id="1" name=""/>
+        <p:cNvGrpSpPr/>
+        <p:nvPr/>
+      </p:nvGrpSpPr>
+      <p:grpSpPr/>
+      <p:sp>
+        <p:nvSpPr>
+          <p:cNvPr id="2" name="TextBox 1"/>
+          <p:cNvSpPr txBox="1"/>
+          <p:nvPr/>
+        </p:nvSpPr>
+        <p:spPr>
+          <a:xfrm>
+            <a:off x="548640" y="411480"/>
+            <a:ext cx="11064240" cy="777240"/>
+          </a:xfrm>
+          <a:prstGeom prst="rect">
+            <a:avLst/>
+          </a:prstGeom>
+          <a:noFill/>
+        </p:spPr>
+        <p:txBody>
+          <a:bodyPr wrap="square">
+            <a:noAutofit/>
+          </a:bodyPr>
+          <a:lstStyle/>
+          <a:p>
+            <a:pPr>
+              <a:lnSpc>
+                <a:spcPts val="2200"/>
+              </a:lnSpc>
+            </a:pPr>
+            <a:r>
+              <a:rPr sz="2800" b="1">
+                <a:solidFill>
+                  <a:srgbClr val="1A1A2E"/>
+                </a:solidFill>
+                <a:latin typeface="Calibri"/>
+              </a:rPr>
+              <a:t>Algorithm sketch — try these</a:t>
+            </a:r>
+          </a:p>
+        </p:txBody>
+      </p:sp>
+      <p:sp>
+        <p:nvSpPr>
+          <p:cNvPr id="3" name="TextBox 2"/>
+          <p:cNvSpPr txBox="1"/>
+          <p:nvPr/>
+        </p:nvSpPr>
+        <p:spPr>
+          <a:xfrm>
+            <a:off x="548640" y="1143000"/>
+            <a:ext cx="11064240" cy="5029200"/>
+          </a:xfrm>
+          <a:prstGeom prst="rect">
+            <a:avLst/>
+          </a:prstGeom>
+          <a:solidFill>
+            <a:srgbClr val="F4F4F4"/>
+          </a:solidFill>
+        </p:spPr>
+        <p:txBody>
+          <a:bodyPr wrap="square">
+            <a:noAutofit/>
+          </a:bodyPr>
+          <a:lstStyle/>
+          <a:p>
+            <a:pPr>
+              <a:lnSpc>
+                <a:spcPts val="2200"/>
+              </a:lnSpc>
+              <a:spcAft>
+                <a:spcPts val="400"/>
+              </a:spcAft>
+            </a:pPr>
+            <a:r>
+              <a:rPr sz="2000" b="0">
+                <a:solidFill>
+                  <a:srgbClr val="333333"/>
+                </a:solidFill>
+                <a:latin typeface="Consolas"/>
+              </a:rPr>
+              <a:t>INPUT: positions, widths, rows Y[], fixed macros</a:t>
+            </a:r>
+          </a:p>
+          <a:p>
+            <a:pPr>
+              <a:lnSpc>
+                <a:spcPts val="2200"/>
+              </a:lnSpc>
+              <a:spcAft>
+                <a:spcPts val="400"/>
+              </a:spcAft>
+            </a:pPr>
+            <a:r>
+              <a:rPr sz="2000" b="0">
+                <a:solidFill>
+                  <a:srgbClr val="333333"/>
+                </a:solidFill>
+                <a:latin typeface="Consolas"/>
+              </a:rPr>
+              <a:t>OUTPUT: legal packing (shelf / Tetris-lite)</a:t>
+            </a:r>
+          </a:p>
+          <a:p>
+            <a:pPr>
+              <a:lnSpc>
+                <a:spcPts val="2200"/>
+              </a:lnSpc>
+              <a:spcAft>
+                <a:spcPts val="400"/>
+              </a:spcAft>
+            </a:pPr>
+            <a:r>
+              <a:rPr sz="2000" b="0">
+                <a:solidFill>
+                  <a:srgbClr val="333333"/>
+                </a:solidFill>
+                <a:latin typeface="Consolas"/>
+              </a:rPr>
+              <a:t>for each movable c: y ← nearest row (freeze)</a:t>
+            </a:r>
+          </a:p>
+          <a:p>
+            <a:pPr>
+              <a:lnSpc>
+                <a:spcPts val="2200"/>
+              </a:lnSpc>
+              <a:spcAft>
+                <a:spcPts val="400"/>
+              </a:spcAft>
+            </a:pPr>
+            <a:r>
+              <a:rPr sz="2000" b="0">
+                <a:solidFill>
+                  <a:srgbClr val="333333"/>
+                </a:solidFill>
+                <a:latin typeface="Consolas"/>
+              </a:rPr>
+              <a:t>then per-row left pack (see overlap removal)</a:t>
+            </a:r>
+          </a:p>
+          <a:p>
+            <a:pPr>
+              <a:lnSpc>
+                <a:spcPts val="2200"/>
+              </a:lnSpc>
+              <a:spcAft>
+                <a:spcPts val="400"/>
+              </a:spcAft>
+            </a:pPr>
+            <a:r>
+              <a:rPr sz="2000" b="0">
+                <a:solidFill>
+                  <a:srgbClr val="333333"/>
+                </a:solidFill>
+                <a:latin typeface="Consolas"/>
+              </a:rPr>
+              <a:t>GOLDEN: A@4 B@6 C@8 on y=2; disp=6; HPWL=32</a:t>
+            </a:r>
+          </a:p>
+          <a:p>
+            <a:pPr>
+              <a:lnSpc>
+                <a:spcPts val="2200"/>
+              </a:lnSpc>
+              <a:spcAft>
+                <a:spcPts val="400"/>
+              </a:spcAft>
+            </a:pPr>
+            <a:r>
+              <a:rPr sz="2000" b="0">
+                <a:solidFill>
+                  <a:srgbClr val="333333"/>
+                </a:solidFill>
+                <a:latin typeface="Consolas"/>
+              </a:rPr>
+              <a:t>COMPARE: Abacus disp=4 (more search)</a:t>
+            </a:r>
+          </a:p>
+        </p:txBody>
+      </p:sp>
+      <p:sp>
+        <p:nvSpPr>
+          <p:cNvPr id="4" name="TextBox 3"/>
+          <p:cNvSpPr txBox="1"/>
+          <p:nvPr/>
+        </p:nvSpPr>
+        <p:spPr>
+          <a:xfrm>
+            <a:off x="548640" y="6355080"/>
+            <a:ext cx="11064240" cy="320040"/>
+          </a:xfrm>
+          <a:prstGeom prst="rect">
+            <a:avLst/>
+          </a:prstGeom>
+          <a:noFill/>
+        </p:spPr>
+        <p:txBody>
+          <a:bodyPr wrap="square">
+            <a:noAutofit/>
+          </a:bodyPr>
+          <a:lstStyle/>
+          <a:p>
+            <a:pPr algn="r">
+              <a:lnSpc>
+                <a:spcPts val="2200"/>
+              </a:lnSpc>
+              <a:defRPr sz="1000" b="0">
+                <a:solidFill>
+                  <a:srgbClr val="666666"/>
+                </a:solidFill>
+                <a:latin typeface="Calibri"/>
+              </a:defRPr>
+            </a:pPr>
+            <a:r>
+              <a:t>learn_legalization — 07 tetris row pack</a:t>
+            </a:r>
+          </a:p>
+        </p:txBody>
+      </p:sp>
+    </p:spTree>
+  </p:cSld>
+  <p:clrMapOvr>
+    <a:masterClrMapping/>
+  </p:clrMapOvr>
+</p:sld>
+</file>
+
+<file path=ppt/slides/slide6.xml><?xml version="1.0" encoding="utf-8"?>
 <p:sld xmlns:a="http://schemas.openxmlformats.org/drawingml/2006/main" xmlns:p="http://schemas.openxmlformats.org/presentationml/2006/main" xmlns:r="http://schemas.openxmlformats.org/officeDocument/2006/relationships">
   <p:cSld>
     <p:spTree>
@@ -5030,7 +6341,7 @@
 </p:sld>
 </file>
 
-<file path=ppt/slides/slide4.xml><?xml version="1.0" encoding="utf-8"?>
+<file path=ppt/slides/slide7.xml><?xml version="1.0" encoding="utf-8"?>
 <p:sld xmlns:a="http://schemas.openxmlformats.org/drawingml/2006/main" xmlns:p="http://schemas.openxmlformats.org/presentationml/2006/main" xmlns:r="http://schemas.openxmlformats.org/officeDocument/2006/relationships">
   <p:cSld>
     <p:spTree>
@@ -5189,7 +6500,7 @@
 </p:sld>
 </file>
 
-<file path=ppt/slides/slide5.xml><?xml version="1.0" encoding="utf-8"?>
+<file path=ppt/slides/slide8.xml><?xml version="1.0" encoding="utf-8"?>
 <p:sld xmlns:a="http://schemas.openxmlformats.org/drawingml/2006/main" xmlns:p="http://schemas.openxmlformats.org/presentationml/2006/main" xmlns:r="http://schemas.openxmlformats.org/officeDocument/2006/relationships">
   <p:cSld>
     <p:spTree>
@@ -5348,7 +6659,7 @@
 </p:sld>
 </file>
 
-<file path=ppt/slides/slide6.xml><?xml version="1.0" encoding="utf-8"?>
+<file path=ppt/slides/slide9.xml><?xml version="1.0" encoding="utf-8"?>
 <p:sld xmlns:a="http://schemas.openxmlformats.org/drawingml/2006/main" xmlns:p="http://schemas.openxmlformats.org/presentationml/2006/main" xmlns:r="http://schemas.openxmlformats.org/officeDocument/2006/relationships">
   <p:cSld>
     <p:spTree>
@@ -5463,553 +6774,6 @@
       <p:sp>
         <p:nvSpPr>
           <p:cNvPr id="5" name="TextBox 4"/>
-          <p:cNvSpPr txBox="1"/>
-          <p:nvPr/>
-        </p:nvSpPr>
-        <p:spPr>
-          <a:xfrm>
-            <a:off x="548640" y="6355080"/>
-            <a:ext cx="11064240" cy="320040"/>
-          </a:xfrm>
-          <a:prstGeom prst="rect">
-            <a:avLst/>
-          </a:prstGeom>
-          <a:noFill/>
-        </p:spPr>
-        <p:txBody>
-          <a:bodyPr wrap="square">
-            <a:noAutofit/>
-          </a:bodyPr>
-          <a:lstStyle/>
-          <a:p>
-            <a:pPr algn="r">
-              <a:lnSpc>
-                <a:spcPts val="2200"/>
-              </a:lnSpc>
-              <a:defRPr sz="1000" b="0">
-                <a:solidFill>
-                  <a:srgbClr val="666666"/>
-                </a:solidFill>
-                <a:latin typeface="Calibri"/>
-              </a:defRPr>
-            </a:pPr>
-            <a:r>
-              <a:t>learn_legalization — 07 tetris row pack</a:t>
-            </a:r>
-          </a:p>
-        </p:txBody>
-      </p:sp>
-    </p:spTree>
-  </p:cSld>
-  <p:clrMapOvr>
-    <a:masterClrMapping/>
-  </p:clrMapOvr>
-</p:sld>
-</file>
-
-<file path=ppt/slides/slide7.xml><?xml version="1.0" encoding="utf-8"?>
-<p:sld xmlns:a="http://schemas.openxmlformats.org/drawingml/2006/main" xmlns:p="http://schemas.openxmlformats.org/presentationml/2006/main" xmlns:r="http://schemas.openxmlformats.org/officeDocument/2006/relationships">
-  <p:cSld>
-    <p:spTree>
-      <p:nvGrpSpPr>
-        <p:cNvPr id="1" name=""/>
-        <p:cNvGrpSpPr/>
-        <p:nvPr/>
-      </p:nvGrpSpPr>
-      <p:grpSpPr/>
-      <p:sp>
-        <p:nvSpPr>
-          <p:cNvPr id="2" name="TextBox 1"/>
-          <p:cNvSpPr txBox="1"/>
-          <p:nvPr/>
-        </p:nvSpPr>
-        <p:spPr>
-          <a:xfrm>
-            <a:off x="548640" y="411480"/>
-            <a:ext cx="11064240" cy="777240"/>
-          </a:xfrm>
-          <a:prstGeom prst="rect">
-            <a:avLst/>
-          </a:prstGeom>
-          <a:noFill/>
-        </p:spPr>
-        <p:txBody>
-          <a:bodyPr wrap="square">
-            <a:noAutofit/>
-          </a:bodyPr>
-          <a:lstStyle/>
-          <a:p>
-            <a:pPr>
-              <a:lnSpc>
-                <a:spcPts val="2200"/>
-              </a:lnSpc>
-            </a:pPr>
-            <a:r>
-              <a:rPr sz="2800" b="1">
-                <a:solidFill>
-                  <a:srgbClr val="1A1A2E"/>
-                </a:solidFill>
-                <a:latin typeface="Calibri"/>
-              </a:rPr>
-              <a:t>Tradeoff: simpler vs better displacement</a:t>
-            </a:r>
-          </a:p>
-        </p:txBody>
-      </p:sp>
-      <p:pic>
-        <p:nvPicPr>
-          <p:cNvPr id="3" name="Picture 2" descr="05-tradeoff.png"/>
-          <p:cNvPicPr>
-            <a:picLocks noChangeAspect="1"/>
-          </p:cNvPicPr>
-          <p:nvPr/>
-        </p:nvPicPr>
-        <p:blipFill>
-          <a:blip r:embed="rId2"/>
-          <a:stretch>
-            <a:fillRect/>
-          </a:stretch>
-        </p:blipFill>
-        <p:spPr>
-          <a:xfrm>
-            <a:off x="548640" y="1143000"/>
-            <a:ext cx="9404113" cy="4572000"/>
-          </a:xfrm>
-          <a:prstGeom prst="rect">
-            <a:avLst/>
-          </a:prstGeom>
-        </p:spPr>
-      </p:pic>
-      <p:sp>
-        <p:nvSpPr>
-          <p:cNvPr id="4" name="TextBox 3"/>
-          <p:cNvSpPr txBox="1"/>
-          <p:nvPr/>
-        </p:nvSpPr>
-        <p:spPr>
-          <a:xfrm>
-            <a:off x="548640" y="5897880"/>
-            <a:ext cx="11064240" cy="411480"/>
-          </a:xfrm>
-          <a:prstGeom prst="rect">
-            <a:avLst/>
-          </a:prstGeom>
-          <a:noFill/>
-        </p:spPr>
-        <p:txBody>
-          <a:bodyPr wrap="square">
-            <a:noAutofit/>
-          </a:bodyPr>
-          <a:lstStyle/>
-          <a:p>
-            <a:pPr>
-              <a:lnSpc>
-                <a:spcPts val="2200"/>
-              </a:lnSpc>
-            </a:pPr>
-            <a:r>
-              <a:rPr sz="1200" b="0">
-                <a:solidFill>
-                  <a:srgbClr val="333333"/>
-                </a:solidFill>
-                <a:latin typeface="Calibri"/>
-              </a:rPr>
-              <a:t>Tradeoff: simpler vs better displacement</a:t>
-            </a:r>
-          </a:p>
-        </p:txBody>
-      </p:sp>
-      <p:sp>
-        <p:nvSpPr>
-          <p:cNvPr id="5" name="TextBox 4"/>
-          <p:cNvSpPr txBox="1"/>
-          <p:nvPr/>
-        </p:nvSpPr>
-        <p:spPr>
-          <a:xfrm>
-            <a:off x="548640" y="6355080"/>
-            <a:ext cx="11064240" cy="320040"/>
-          </a:xfrm>
-          <a:prstGeom prst="rect">
-            <a:avLst/>
-          </a:prstGeom>
-          <a:noFill/>
-        </p:spPr>
-        <p:txBody>
-          <a:bodyPr wrap="square">
-            <a:noAutofit/>
-          </a:bodyPr>
-          <a:lstStyle/>
-          <a:p>
-            <a:pPr algn="r">
-              <a:lnSpc>
-                <a:spcPts val="2200"/>
-              </a:lnSpc>
-              <a:defRPr sz="1000" b="0">
-                <a:solidFill>
-                  <a:srgbClr val="666666"/>
-                </a:solidFill>
-                <a:latin typeface="Calibri"/>
-              </a:defRPr>
-            </a:pPr>
-            <a:r>
-              <a:t>learn_legalization — 07 tetris row pack</a:t>
-            </a:r>
-          </a:p>
-        </p:txBody>
-      </p:sp>
-    </p:spTree>
-  </p:cSld>
-  <p:clrMapOvr>
-    <a:masterClrMapping/>
-  </p:clrMapOvr>
-</p:sld>
-</file>
-
-<file path=ppt/slides/slide8.xml><?xml version="1.0" encoding="utf-8"?>
-<p:sld xmlns:a="http://schemas.openxmlformats.org/drawingml/2006/main" xmlns:p="http://schemas.openxmlformats.org/presentationml/2006/main" xmlns:r="http://schemas.openxmlformats.org/officeDocument/2006/relationships">
-  <p:cSld>
-    <p:spTree>
-      <p:nvGrpSpPr>
-        <p:cNvPr id="1" name=""/>
-        <p:cNvGrpSpPr/>
-        <p:nvPr/>
-      </p:nvGrpSpPr>
-      <p:grpSpPr/>
-      <p:sp>
-        <p:nvSpPr>
-          <p:cNvPr id="2" name="TextBox 1"/>
-          <p:cNvSpPr txBox="1"/>
-          <p:nvPr/>
-        </p:nvSpPr>
-        <p:spPr>
-          <a:xfrm>
-            <a:off x="548640" y="411480"/>
-            <a:ext cx="11064240" cy="777240"/>
-          </a:xfrm>
-          <a:prstGeom prst="rect">
-            <a:avLst/>
-          </a:prstGeom>
-          <a:noFill/>
-        </p:spPr>
-        <p:txBody>
-          <a:bodyPr wrap="square">
-            <a:noAutofit/>
-          </a:bodyPr>
-          <a:lstStyle/>
-          <a:p>
-            <a:pPr>
-              <a:lnSpc>
-                <a:spcPts val="2200"/>
-              </a:lnSpc>
-            </a:pPr>
-            <a:r>
-              <a:rPr sz="2800" b="1">
-                <a:solidFill>
-                  <a:srgbClr val="1A1A2E"/>
-                </a:solidFill>
-                <a:latin typeface="Calibri"/>
-              </a:rPr>
-              <a:t>Browser lab track</a:t>
-            </a:r>
-          </a:p>
-        </p:txBody>
-      </p:sp>
-      <p:sp>
-        <p:nvSpPr>
-          <p:cNvPr id="3" name="TextBox 2"/>
-          <p:cNvSpPr txBox="1"/>
-          <p:nvPr/>
-        </p:nvSpPr>
-        <p:spPr>
-          <a:xfrm>
-            <a:off x="548640" y="1234440"/>
-            <a:ext cx="11064240" cy="4937760"/>
-          </a:xfrm>
-          <a:prstGeom prst="rect">
-            <a:avLst/>
-          </a:prstGeom>
-          <a:noFill/>
-        </p:spPr>
-        <p:txBody>
-          <a:bodyPr wrap="square">
-            <a:noAutofit/>
-          </a:bodyPr>
-          <a:lstStyle/>
-          <a:p>
-            <a:pPr lvl="0" marL="457200" indent="-228600">
-              <a:buFont typeface="Calibri"/>
-              <a:spcAft>
-                <a:spcPts val="1000"/>
-              </a:spcAft>
-              <a:buSzPct val="100000"/>
-              <a:buChar char="•"/>
-              <a:lnSpc>
-                <a:spcPts val="2200"/>
-              </a:lnSpc>
-            </a:pPr>
-            <a:r>
-              <a:rPr sz="2000" b="0">
-                <a:solidFill>
-                  <a:srgbClr val="333333"/>
-                </a:solidFill>
-                <a:latin typeface="Calibri"/>
-              </a:rPr>
-              <a:t>In the browser lab track, open the </a:t>
-            </a:r>
-            <a:r>
-              <a:rPr sz="2000" b="1">
-                <a:solidFill>
-                  <a:srgbClr val="333333"/>
-                </a:solidFill>
-                <a:latin typeface="Calibri"/>
-              </a:rPr>
-              <a:t>tetris-row-pack</a:t>
-            </a:r>
-            <a:r>
-              <a:rPr sz="2000" b="0">
-                <a:solidFill>
-                  <a:srgbClr val="333333"/>
-                </a:solidFill>
-                <a:latin typeface="Calibri"/>
-              </a:rPr>
-              <a:t> lab from the tools shelf</a:t>
-            </a:r>
-          </a:p>
-          <a:p>
-            <a:pPr lvl="0" marL="457200" indent="-228600">
-              <a:buFont typeface="Calibri"/>
-              <a:spcAft>
-                <a:spcPts val="1000"/>
-              </a:spcAft>
-              <a:buSzPct val="100000"/>
-              <a:buChar char="•"/>
-              <a:lnSpc>
-                <a:spcPts val="2200"/>
-              </a:lnSpc>
-            </a:pPr>
-            <a:r>
-              <a:rPr sz="2000" b="0">
-                <a:solidFill>
-                  <a:srgbClr val="333333"/>
-                </a:solidFill>
-                <a:latin typeface="Calibri"/>
-              </a:rPr>
-              <a:t>Load the overlap or float starter, run the legalizer once</a:t>
-            </a:r>
-          </a:p>
-          <a:p>
-            <a:pPr lvl="0" marL="457200" indent="-228600">
-              <a:buFont typeface="Calibri"/>
-              <a:spcAft>
-                <a:spcPts val="1000"/>
-              </a:spcAft>
-              <a:buSzPct val="100000"/>
-              <a:buChar char="•"/>
-              <a:lnSpc>
-                <a:spcPts val="2200"/>
-              </a:lnSpc>
-            </a:pPr>
-            <a:r>
-              <a:rPr sz="2000" b="0">
-                <a:solidFill>
-                  <a:srgbClr val="333333"/>
-                </a:solidFill>
-                <a:latin typeface="Calibri"/>
-              </a:rPr>
-              <a:t>Work the challenges that lock the goldens</a:t>
-            </a:r>
-          </a:p>
-        </p:txBody>
-      </p:sp>
-      <p:sp>
-        <p:nvSpPr>
-          <p:cNvPr id="4" name="TextBox 3"/>
-          <p:cNvSpPr txBox="1"/>
-          <p:nvPr/>
-        </p:nvSpPr>
-        <p:spPr>
-          <a:xfrm>
-            <a:off x="548640" y="6355080"/>
-            <a:ext cx="11064240" cy="320040"/>
-          </a:xfrm>
-          <a:prstGeom prst="rect">
-            <a:avLst/>
-          </a:prstGeom>
-          <a:noFill/>
-        </p:spPr>
-        <p:txBody>
-          <a:bodyPr wrap="square">
-            <a:noAutofit/>
-          </a:bodyPr>
-          <a:lstStyle/>
-          <a:p>
-            <a:pPr algn="r">
-              <a:lnSpc>
-                <a:spcPts val="2200"/>
-              </a:lnSpc>
-              <a:defRPr sz="1000" b="0">
-                <a:solidFill>
-                  <a:srgbClr val="666666"/>
-                </a:solidFill>
-                <a:latin typeface="Calibri"/>
-              </a:defRPr>
-            </a:pPr>
-            <a:r>
-              <a:t>learn_legalization — 07 tetris row pack</a:t>
-            </a:r>
-          </a:p>
-        </p:txBody>
-      </p:sp>
-    </p:spTree>
-  </p:cSld>
-  <p:clrMapOvr>
-    <a:masterClrMapping/>
-  </p:clrMapOvr>
-</p:sld>
-</file>
-
-<file path=ppt/slides/slide9.xml><?xml version="1.0" encoding="utf-8"?>
-<p:sld xmlns:a="http://schemas.openxmlformats.org/drawingml/2006/main" xmlns:p="http://schemas.openxmlformats.org/presentationml/2006/main" xmlns:r="http://schemas.openxmlformats.org/officeDocument/2006/relationships">
-  <p:cSld>
-    <p:spTree>
-      <p:nvGrpSpPr>
-        <p:cNvPr id="1" name=""/>
-        <p:cNvGrpSpPr/>
-        <p:nvPr/>
-      </p:nvGrpSpPr>
-      <p:grpSpPr/>
-      <p:sp>
-        <p:nvSpPr>
-          <p:cNvPr id="2" name="TextBox 1"/>
-          <p:cNvSpPr txBox="1"/>
-          <p:nvPr/>
-        </p:nvSpPr>
-        <p:spPr>
-          <a:xfrm>
-            <a:off x="548640" y="411480"/>
-            <a:ext cx="11064240" cy="777240"/>
-          </a:xfrm>
-          <a:prstGeom prst="rect">
-            <a:avLst/>
-          </a:prstGeom>
-          <a:noFill/>
-        </p:spPr>
-        <p:txBody>
-          <a:bodyPr wrap="square">
-            <a:noAutofit/>
-          </a:bodyPr>
-          <a:lstStyle/>
-          <a:p>
-            <a:pPr>
-              <a:lnSpc>
-                <a:spcPts val="2200"/>
-              </a:lnSpc>
-            </a:pPr>
-            <a:r>
-              <a:rPr sz="2800" b="1">
-                <a:solidFill>
-                  <a:srgbClr val="1A1A2E"/>
-                </a:solidFill>
-                <a:latin typeface="Calibri"/>
-              </a:rPr>
-              <a:t>Implement track</a:t>
-            </a:r>
-          </a:p>
-        </p:txBody>
-      </p:sp>
-      <p:sp>
-        <p:nvSpPr>
-          <p:cNvPr id="3" name="TextBox 2"/>
-          <p:cNvSpPr txBox="1"/>
-          <p:nvPr/>
-        </p:nvSpPr>
-        <p:spPr>
-          <a:xfrm>
-            <a:off x="548640" y="1234440"/>
-            <a:ext cx="11064240" cy="4937760"/>
-          </a:xfrm>
-          <a:prstGeom prst="rect">
-            <a:avLst/>
-          </a:prstGeom>
-          <a:noFill/>
-        </p:spPr>
-        <p:txBody>
-          <a:bodyPr wrap="square">
-            <a:noAutofit/>
-          </a:bodyPr>
-          <a:lstStyle/>
-          <a:p>
-            <a:pPr lvl="0" marL="457200" indent="-228600">
-              <a:buFont typeface="Calibri"/>
-              <a:spcAft>
-                <a:spcPts val="1000"/>
-              </a:spcAft>
-              <a:buSzPct val="100000"/>
-              <a:buChar char="•"/>
-              <a:lnSpc>
-                <a:spcPts val="2200"/>
-              </a:lnSpc>
-            </a:pPr>
-            <a:r>
-              <a:rPr sz="2000" b="0">
-                <a:solidFill>
-                  <a:srgbClr val="333333"/>
-                </a:solidFill>
-                <a:latin typeface="Calibri"/>
-              </a:rPr>
-              <a:t>In the implement track, open this module's examples and the course `common/` solvers</a:t>
-            </a:r>
-          </a:p>
-          <a:p>
-            <a:pPr lvl="0" marL="457200" indent="-228600">
-              <a:buFont typeface="Calibri"/>
-              <a:spcAft>
-                <a:spcPts val="1000"/>
-              </a:spcAft>
-              <a:buSzPct val="100000"/>
-              <a:buChar char="•"/>
-              <a:lnSpc>
-                <a:spcPts val="2200"/>
-              </a:lnSpc>
-            </a:pPr>
-            <a:r>
-              <a:rPr sz="2000" b="0">
-                <a:solidFill>
-                  <a:srgbClr val="333333"/>
-                </a:solidFill>
-                <a:latin typeface="Calibri"/>
-              </a:rPr>
-              <a:t>Parse `tiny_legal.json`, run the algorithm with deterministic coordinates</a:t>
-            </a:r>
-          </a:p>
-          <a:p>
-            <a:pPr lvl="0" marL="457200" indent="-228600">
-              <a:buFont typeface="Calibri"/>
-              <a:spcAft>
-                <a:spcPts val="1000"/>
-              </a:spcAft>
-              <a:buSzPct val="100000"/>
-              <a:buChar char="•"/>
-              <a:lnSpc>
-                <a:spcPts val="2200"/>
-              </a:lnSpc>
-            </a:pPr>
-            <a:r>
-              <a:rPr sz="2000" b="0">
-                <a:solidFill>
-                  <a:srgbClr val="333333"/>
-                </a:solidFill>
-                <a:latin typeface="Calibri"/>
-              </a:rPr>
-              <a:t>Match the browser goldens before you claim the checklist</a:t>
-            </a:r>
-          </a:p>
-        </p:txBody>
-      </p:sp>
-      <p:sp>
-        <p:nvSpPr>
-          <p:cNvPr id="4" name="TextBox 3"/>
           <p:cNvSpPr txBox="1"/>
           <p:nvPr/>
         </p:nvSpPr>
